--- a/Agentic_RAG_PPT.pptx
+++ b/Agentic_RAG_PPT.pptx
@@ -3304,8 +3304,8 @@
         </p:blipFill>
         <p:spPr>
           <a:xfrm>
-            <a:off x="74810" y="1373524"/>
-            <a:ext cx="8994355" cy="4273995"/>
+            <a:off x="1686180" y="1373524"/>
+            <a:ext cx="5771639" cy="5255876"/>
           </a:xfrm>
           <a:prstGeom prst="rect">
             <a:avLst/>
@@ -3452,8 +3452,8 @@
         </p:blipFill>
         <p:spPr>
           <a:xfrm>
-            <a:off x="145849" y="1755786"/>
-            <a:ext cx="8852237" cy="3776825"/>
+            <a:off x="145881" y="1755786"/>
+            <a:ext cx="8852237" cy="3314880"/>
           </a:xfrm>
           <a:prstGeom prst="rect">
             <a:avLst/>
@@ -3549,8 +3549,8 @@
         </p:blipFill>
         <p:spPr>
           <a:xfrm>
-            <a:off x="108476" y="1296864"/>
-            <a:ext cx="8712983" cy="4104949"/>
+            <a:off x="1375199" y="1296864"/>
+            <a:ext cx="6393601" cy="5332536"/>
           </a:xfrm>
           <a:prstGeom prst="rect">
             <a:avLst/>
@@ -3673,7 +3673,7 @@
               <a:defRPr b="1" sz="3200"/>
             </a:pPr>
             <a:r>
-              <a:t>3. Context Verification with Verify Node</a:t>
+              <a:t>3. Dynamic Action Selection with Decide Node</a:t>
             </a:r>
           </a:p>
         </p:txBody>
@@ -3697,8 +3697,8 @@
         </p:blipFill>
         <p:spPr>
           <a:xfrm>
-            <a:off x="33336" y="1857354"/>
-            <a:ext cx="9077268" cy="2819552"/>
+            <a:off x="33366" y="1857354"/>
+            <a:ext cx="9077268" cy="4248933"/>
           </a:xfrm>
           <a:prstGeom prst="rect">
             <a:avLst/>
@@ -4256,7 +4256,7 @@
               <a:defRPr sz="2400"/>
             </a:pPr>
             <a:r>
-              <a:t>Financial workflows require full state visibility and explicit loop control, avoiding stochastic LLM routing.</a:t>
+              <a:t>Financial workflows require full state visibility and explicit loop control. Routing is a validated enum, never free-form LLM output.</a:t>
             </a:r>
           </a:p>
           <a:p>
@@ -4300,7 +4300,7 @@
               <a:defRPr sz="2700"/>
             </a:pPr>
             <a:r>
-              <a:t>State Persistence (Checkpointing):</a:t>
+              <a:t>Stateless Re-planning (no checkpointer):</a:t>
             </a:r>
           </a:p>
           <a:p>
@@ -4311,7 +4311,7 @@
               <a:defRPr sz="2400"/>
             </a:pPr>
             <a:r>
-              <a:t>State is persisted via thread_id, allowing the graph to safely pause (interrupt) for user input without context loss.</a:t>
+              <a:t>A clarification re-enters the graph as a fresh run carrying the original question. Costs one extra small-model call, and removes thread state as a failure mode.</a:t>
             </a:r>
           </a:p>
         </p:txBody>
@@ -4560,7 +4560,7 @@
               <a:defRPr sz="1400"/>
             </a:pPr>
             <a:r>
-              <a:t>Each node executes one explicit task. Edges are controlled by Python logic, not LLM guesses</a:t>
+              <a:t>Each node executes one explicit task. The Decide node picks the next action from a closed enum; the retry budget stays in Python.</a:t>
             </a:r>
           </a:p>
         </p:txBody>
@@ -4583,8 +4583,8 @@
         </p:blipFill>
         <p:spPr>
           <a:xfrm>
-            <a:off x="226147" y="1269540"/>
-            <a:ext cx="5487083" cy="4318921"/>
+            <a:off x="226147" y="2332900"/>
+            <a:ext cx="5487083" cy="2192201"/>
           </a:xfrm>
           <a:prstGeom prst="rect">
             <a:avLst/>
